--- a/examples/playground/_out/02_research_findings.pptx
+++ b/examples/playground/_out/02_research_findings.pptx
@@ -119,7 +119,7 @@
     <c:autoTitleDeleted val="1"/>
     <c:plotArea>
       <c:scatterChart>
-        <c:scatterStyle val="lineMarker"/>
+        <c:scatterStyle val="marker"/>
         <c:varyColors val="0"/>
         <c:ser>
           <c:idx val="0"/>
@@ -135,11 +135,6 @@
               </c:strCache>
             </c:strRef>
           </c:tx>
-          <c:spPr>
-            <a:ln w="47625">
-              <a:noFill/>
-            </a:ln>
-          </c:spPr>
           <c:marker>
             <c:size val="10"/>
             <c:spPr>
@@ -229,11 +224,6 @@
               </c:strCache>
             </c:strRef>
           </c:tx>
-          <c:spPr>
-            <a:ln w="47625">
-              <a:noFill/>
-            </a:ln>
-          </c:spPr>
           <c:marker>
             <c:size val="10"/>
             <c:spPr>
@@ -323,11 +313,6 @@
               </c:strCache>
             </c:strRef>
           </c:tx>
-          <c:spPr>
-            <a:ln w="47625">
-              <a:noFill/>
-            </a:ln>
-          </c:spPr>
           <c:marker>
             <c:size val="10"/>
             <c:spPr>
